--- a/modules/M2-finding/M2-finding.pptx
+++ b/modules/M2-finding/M2-finding.pptx
@@ -16559,7 +16559,7 @@
           <a:lstStyle/>
           <a:p>
             <a:r>
-              <a:t>Lab 2: ~60 Minutes</a:t>
+              <a:t>Lab 2: ~50 Minutes</a:t>
             </a:r>
           </a:p>
         </p:txBody>

--- a/modules/M2-finding/M2-finding.pptx
+++ b/modules/M2-finding/M2-finding.pptx
@@ -1092,7 +1092,7 @@
           <a:p>
             <a:r>
               <a:rPr dirty="0"/>
-              <a:t>~8 min · </a:t>
+              <a:t>~5 min · </a:t>
             </a:r>
             <a:r>
               <a:rPr dirty="0">
@@ -2093,7 +2093,7 @@
           <a:p>
             <a:r>
               <a:rPr dirty="0"/>
-              <a:t>~12 min · </a:t>
+              <a:t>~8 min · </a:t>
             </a:r>
             <a:r>
               <a:rPr dirty="0">
@@ -2761,7 +2761,7 @@
           <a:p>
             <a:r>
               <a:rPr dirty="0"/>
-              <a:t>~6 min · </a:t>
+              <a:t>~4 min · </a:t>
             </a:r>
             <a:r>
               <a:rPr dirty="0">
